--- a/ThetaGammaDocuments/论文_lzy.pptx
+++ b/ThetaGammaDocuments/论文_lzy.pptx
@@ -6,7 +6,9 @@
   </p:sldMasterIdLst>
   <p:sldIdLst>
     <p:sldId id="276" r:id="rId2"/>
-    <p:sldId id="277" r:id="rId3"/>
+    <p:sldId id="278" r:id="rId3"/>
+    <p:sldId id="279" r:id="rId4"/>
+    <p:sldId id="277" r:id="rId5"/>
   </p:sldIdLst>
   <p:sldSz cx="12192000" cy="6858000"/>
   <p:notesSz cx="6858000" cy="9144000"/>
@@ -260,7 +262,7 @@
           <a:p>
             <a:fld id="{FCE8CC61-20DA-F749-A5C5-B7F8A1DBB665}" type="datetimeFigureOut">
               <a:rPr kumimoji="1" lang="zh-CN" altLang="en-US" smtClean="0"/>
-              <a:t>2025/11/3</a:t>
+              <a:t>2025/12/2</a:t>
             </a:fld>
             <a:endParaRPr kumimoji="1" lang="zh-CN" altLang="en-US"/>
           </a:p>
@@ -458,7 +460,7 @@
           <a:p>
             <a:fld id="{FCE8CC61-20DA-F749-A5C5-B7F8A1DBB665}" type="datetimeFigureOut">
               <a:rPr kumimoji="1" lang="zh-CN" altLang="en-US" smtClean="0"/>
-              <a:t>2025/11/3</a:t>
+              <a:t>2025/12/2</a:t>
             </a:fld>
             <a:endParaRPr kumimoji="1" lang="zh-CN" altLang="en-US"/>
           </a:p>
@@ -666,7 +668,7 @@
           <a:p>
             <a:fld id="{FCE8CC61-20DA-F749-A5C5-B7F8A1DBB665}" type="datetimeFigureOut">
               <a:rPr kumimoji="1" lang="zh-CN" altLang="en-US" smtClean="0"/>
-              <a:t>2025/11/3</a:t>
+              <a:t>2025/12/2</a:t>
             </a:fld>
             <a:endParaRPr kumimoji="1" lang="zh-CN" altLang="en-US"/>
           </a:p>
@@ -864,7 +866,7 @@
           <a:p>
             <a:fld id="{FCE8CC61-20DA-F749-A5C5-B7F8A1DBB665}" type="datetimeFigureOut">
               <a:rPr kumimoji="1" lang="zh-CN" altLang="en-US" smtClean="0"/>
-              <a:t>2025/11/3</a:t>
+              <a:t>2025/12/2</a:t>
             </a:fld>
             <a:endParaRPr kumimoji="1" lang="zh-CN" altLang="en-US"/>
           </a:p>
@@ -1139,7 +1141,7 @@
           <a:p>
             <a:fld id="{FCE8CC61-20DA-F749-A5C5-B7F8A1DBB665}" type="datetimeFigureOut">
               <a:rPr kumimoji="1" lang="zh-CN" altLang="en-US" smtClean="0"/>
-              <a:t>2025/11/3</a:t>
+              <a:t>2025/12/2</a:t>
             </a:fld>
             <a:endParaRPr kumimoji="1" lang="zh-CN" altLang="en-US"/>
           </a:p>
@@ -1404,7 +1406,7 @@
           <a:p>
             <a:fld id="{FCE8CC61-20DA-F749-A5C5-B7F8A1DBB665}" type="datetimeFigureOut">
               <a:rPr kumimoji="1" lang="zh-CN" altLang="en-US" smtClean="0"/>
-              <a:t>2025/11/3</a:t>
+              <a:t>2025/12/2</a:t>
             </a:fld>
             <a:endParaRPr kumimoji="1" lang="zh-CN" altLang="en-US"/>
           </a:p>
@@ -1816,7 +1818,7 @@
           <a:p>
             <a:fld id="{FCE8CC61-20DA-F749-A5C5-B7F8A1DBB665}" type="datetimeFigureOut">
               <a:rPr kumimoji="1" lang="zh-CN" altLang="en-US" smtClean="0"/>
-              <a:t>2025/11/3</a:t>
+              <a:t>2025/12/2</a:t>
             </a:fld>
             <a:endParaRPr kumimoji="1" lang="zh-CN" altLang="en-US"/>
           </a:p>
@@ -1957,7 +1959,7 @@
           <a:p>
             <a:fld id="{FCE8CC61-20DA-F749-A5C5-B7F8A1DBB665}" type="datetimeFigureOut">
               <a:rPr kumimoji="1" lang="zh-CN" altLang="en-US" smtClean="0"/>
-              <a:t>2025/11/3</a:t>
+              <a:t>2025/12/2</a:t>
             </a:fld>
             <a:endParaRPr kumimoji="1" lang="zh-CN" altLang="en-US"/>
           </a:p>
@@ -2070,7 +2072,7 @@
           <a:p>
             <a:fld id="{FCE8CC61-20DA-F749-A5C5-B7F8A1DBB665}" type="datetimeFigureOut">
               <a:rPr kumimoji="1" lang="zh-CN" altLang="en-US" smtClean="0"/>
-              <a:t>2025/11/3</a:t>
+              <a:t>2025/12/2</a:t>
             </a:fld>
             <a:endParaRPr kumimoji="1" lang="zh-CN" altLang="en-US"/>
           </a:p>
@@ -2381,7 +2383,7 @@
           <a:p>
             <a:fld id="{FCE8CC61-20DA-F749-A5C5-B7F8A1DBB665}" type="datetimeFigureOut">
               <a:rPr kumimoji="1" lang="zh-CN" altLang="en-US" smtClean="0"/>
-              <a:t>2025/11/3</a:t>
+              <a:t>2025/12/2</a:t>
             </a:fld>
             <a:endParaRPr kumimoji="1" lang="zh-CN" altLang="en-US"/>
           </a:p>
@@ -2669,7 +2671,7 @@
           <a:p>
             <a:fld id="{FCE8CC61-20DA-F749-A5C5-B7F8A1DBB665}" type="datetimeFigureOut">
               <a:rPr kumimoji="1" lang="zh-CN" altLang="en-US" smtClean="0"/>
-              <a:t>2025/11/3</a:t>
+              <a:t>2025/12/2</a:t>
             </a:fld>
             <a:endParaRPr kumimoji="1" lang="zh-CN" altLang="en-US"/>
           </a:p>
@@ -2910,7 +2912,7 @@
           <a:p>
             <a:fld id="{FCE8CC61-20DA-F749-A5C5-B7F8A1DBB665}" type="datetimeFigureOut">
               <a:rPr kumimoji="1" lang="zh-CN" altLang="en-US" smtClean="0"/>
-              <a:t>2025/11/3</a:t>
+              <a:t>2025/12/2</a:t>
             </a:fld>
             <a:endParaRPr kumimoji="1" lang="zh-CN" altLang="en-US"/>
           </a:p>
@@ -3769,6 +3771,1044 @@
 </file>
 
 <file path=ppt/slides/slide2.xml><?xml version="1.0" encoding="utf-8"?>
+<p:sld xmlns:a="http://schemas.openxmlformats.org/drawingml/2006/main" xmlns:r="http://schemas.openxmlformats.org/officeDocument/2006/relationships" xmlns:p="http://schemas.openxmlformats.org/presentationml/2006/main">
+  <p:cSld>
+    <p:spTree>
+      <p:nvGrpSpPr>
+        <p:cNvPr id="1" name="">
+          <a:extLst>
+            <a:ext uri="{FF2B5EF4-FFF2-40B4-BE49-F238E27FC236}">
+              <a16:creationId xmlns:a16="http://schemas.microsoft.com/office/drawing/2014/main" id="{0BAE0BFC-F167-EB10-934F-9E931B717C7B}"/>
+            </a:ext>
+          </a:extLst>
+        </p:cNvPr>
+        <p:cNvGrpSpPr/>
+        <p:nvPr/>
+      </p:nvGrpSpPr>
+      <p:grpSpPr>
+        <a:xfrm>
+          <a:off x="0" y="0"/>
+          <a:ext cx="0" cy="0"/>
+          <a:chOff x="0" y="0"/>
+          <a:chExt cx="0" cy="0"/>
+        </a:xfrm>
+      </p:grpSpPr>
+      <p:sp>
+        <p:nvSpPr>
+          <p:cNvPr id="2" name="标题 1">
+            <a:extLst>
+              <a:ext uri="{FF2B5EF4-FFF2-40B4-BE49-F238E27FC236}">
+                <a16:creationId xmlns:a16="http://schemas.microsoft.com/office/drawing/2014/main" id="{5A1B1AFA-0BEA-1C86-9AFC-BA9383DE69FE}"/>
+              </a:ext>
+            </a:extLst>
+          </p:cNvPr>
+          <p:cNvSpPr>
+            <a:spLocks noGrp="1"/>
+          </p:cNvSpPr>
+          <p:nvPr>
+            <p:ph type="title"/>
+          </p:nvPr>
+        </p:nvSpPr>
+        <p:spPr>
+          <a:xfrm>
+            <a:off x="0" y="0"/>
+            <a:ext cx="10204729" cy="759309"/>
+          </a:xfrm>
+        </p:spPr>
+        <p:txBody>
+          <a:bodyPr/>
+          <a:lstStyle/>
+          <a:p>
+            <a:r>
+              <a:rPr kumimoji="1" lang="en-US" altLang="zh-CN" b="1" dirty="0"/>
+              <a:t>Problem</a:t>
+            </a:r>
+            <a:r>
+              <a:rPr kumimoji="1" lang="zh-CN" altLang="en-US" b="1" dirty="0"/>
+              <a:t> </a:t>
+            </a:r>
+            <a:r>
+              <a:rPr kumimoji="1" lang="en-US" altLang="zh-CN" b="1" dirty="0"/>
+              <a:t>&amp;</a:t>
+            </a:r>
+            <a:r>
+              <a:rPr kumimoji="1" lang="zh-CN" altLang="en-US" b="1" dirty="0"/>
+              <a:t> </a:t>
+            </a:r>
+            <a:r>
+              <a:rPr kumimoji="1" lang="en-US" altLang="zh-CN" b="1" dirty="0"/>
+              <a:t>Core</a:t>
+            </a:r>
+            <a:r>
+              <a:rPr kumimoji="1" lang="zh-CN" altLang="en-US" b="1" dirty="0"/>
+              <a:t> </a:t>
+            </a:r>
+            <a:r>
+              <a:rPr kumimoji="1" lang="en-US" altLang="zh-CN" b="1" dirty="0"/>
+              <a:t>Bottleneck</a:t>
+            </a:r>
+            <a:r>
+              <a:rPr kumimoji="1" lang="zh-CN" altLang="en-US" b="1" dirty="0"/>
+              <a:t> </a:t>
+            </a:r>
+            <a:r>
+              <a:rPr kumimoji="1" lang="en-US" altLang="zh-CN" b="1" dirty="0"/>
+              <a:t>Examples</a:t>
+            </a:r>
+            <a:endParaRPr kumimoji="1" lang="zh-CN" altLang="en-US" b="1" dirty="0"/>
+          </a:p>
+        </p:txBody>
+      </p:sp>
+      <p:pic>
+        <p:nvPicPr>
+          <p:cNvPr id="6" name="图片 5" descr="图表, 条形图&#10;&#10;AI 生成的内容可能不正确。">
+            <a:extLst>
+              <a:ext uri="{FF2B5EF4-FFF2-40B4-BE49-F238E27FC236}">
+                <a16:creationId xmlns:a16="http://schemas.microsoft.com/office/drawing/2014/main" id="{D138A896-B530-CC42-6143-9FBF07C43ABE}"/>
+              </a:ext>
+            </a:extLst>
+          </p:cNvPr>
+          <p:cNvPicPr>
+            <a:picLocks noChangeAspect="1"/>
+          </p:cNvPicPr>
+          <p:nvPr/>
+        </p:nvPicPr>
+        <p:blipFill>
+          <a:blip r:embed="rId2"/>
+          <a:stretch>
+            <a:fillRect/>
+          </a:stretch>
+        </p:blipFill>
+        <p:spPr>
+          <a:xfrm>
+            <a:off x="8097328" y="623548"/>
+            <a:ext cx="4094672" cy="2047336"/>
+          </a:xfrm>
+          <a:prstGeom prst="rect">
+            <a:avLst/>
+          </a:prstGeom>
+        </p:spPr>
+      </p:pic>
+      <p:sp>
+        <p:nvSpPr>
+          <p:cNvPr id="7" name="文本框 6">
+            <a:extLst>
+              <a:ext uri="{FF2B5EF4-FFF2-40B4-BE49-F238E27FC236}">
+                <a16:creationId xmlns:a16="http://schemas.microsoft.com/office/drawing/2014/main" id="{C230BDE9-A5DB-A0F0-8299-D1AB5AEFE57B}"/>
+              </a:ext>
+            </a:extLst>
+          </p:cNvPr>
+          <p:cNvSpPr txBox="1"/>
+          <p:nvPr/>
+        </p:nvSpPr>
+        <p:spPr>
+          <a:xfrm>
+            <a:off x="8040106" y="2986070"/>
+            <a:ext cx="4329246" cy="307777"/>
+          </a:xfrm>
+          <a:prstGeom prst="rect">
+            <a:avLst/>
+          </a:prstGeom>
+          <a:noFill/>
+        </p:spPr>
+        <p:txBody>
+          <a:bodyPr wrap="square" rtlCol="0">
+            <a:spAutoFit/>
+          </a:bodyPr>
+          <a:lstStyle/>
+          <a:p>
+            <a:r>
+              <a:rPr kumimoji="1" lang="zh-CN" altLang="en-US" sz="1400" dirty="0"/>
+              <a:t>注意力和子问题连贯性会随着跳数增加而逐步衰减。</a:t>
+            </a:r>
+          </a:p>
+        </p:txBody>
+      </p:sp>
+      <p:sp>
+        <p:nvSpPr>
+          <p:cNvPr id="11" name="圆角矩形 10">
+            <a:extLst>
+              <a:ext uri="{FF2B5EF4-FFF2-40B4-BE49-F238E27FC236}">
+                <a16:creationId xmlns:a16="http://schemas.microsoft.com/office/drawing/2014/main" id="{0396D1B0-5968-30BB-2FE4-1DD656C11600}"/>
+              </a:ext>
+            </a:extLst>
+          </p:cNvPr>
+          <p:cNvSpPr/>
+          <p:nvPr/>
+        </p:nvSpPr>
+        <p:spPr>
+          <a:xfrm>
+            <a:off x="201475" y="4651131"/>
+            <a:ext cx="6885125" cy="2074984"/>
+          </a:xfrm>
+          <a:prstGeom prst="roundRect">
+            <a:avLst/>
+          </a:prstGeom>
+          <a:solidFill>
+            <a:schemeClr val="accent2">
+              <a:lumMod val="60000"/>
+              <a:lumOff val="40000"/>
+            </a:schemeClr>
+          </a:solidFill>
+          <a:ln w="38100" cap="rnd">
+            <a:noFill/>
+            <a:miter lim="800000"/>
+          </a:ln>
+          <a:effectLst>
+            <a:outerShdw blurRad="63500" sx="101000" sy="101000" algn="ctr" rotWithShape="0">
+              <a:prstClr val="black">
+                <a:alpha val="40000"/>
+              </a:prstClr>
+            </a:outerShdw>
+            <a:softEdge rad="0"/>
+          </a:effectLst>
+        </p:spPr>
+        <p:style>
+          <a:lnRef idx="2">
+            <a:schemeClr val="accent1">
+              <a:shade val="15000"/>
+            </a:schemeClr>
+          </a:lnRef>
+          <a:fillRef idx="1">
+            <a:schemeClr val="accent1"/>
+          </a:fillRef>
+          <a:effectRef idx="0">
+            <a:schemeClr val="accent1"/>
+          </a:effectRef>
+          <a:fontRef idx="minor">
+            <a:schemeClr val="lt1"/>
+          </a:fontRef>
+        </p:style>
+        <p:txBody>
+          <a:bodyPr rtlCol="0" anchor="ctr"/>
+          <a:lstStyle/>
+          <a:p>
+            <a:r>
+              <a:rPr lang="en-US" altLang="zh-CN" b="1" dirty="0">
+                <a:solidFill>
+                  <a:schemeClr val="tx1"/>
+                </a:solidFill>
+                <a:latin typeface="Baloo Bhai 2" panose="03080502040302020200" pitchFamily="66" charset="0"/>
+                <a:cs typeface="Baloo Bhai 2" panose="03080502040302020200" pitchFamily="66" charset="0"/>
+              </a:rPr>
+              <a:t>Anchor Shift</a:t>
+            </a:r>
+          </a:p>
+          <a:p>
+            <a:r>
+              <a:rPr lang="en-US" altLang="zh-CN" dirty="0">
+                <a:solidFill>
+                  <a:schemeClr val="tx1"/>
+                </a:solidFill>
+                <a:latin typeface="Baloo Bhai 2" panose="03080502040302020200" pitchFamily="66" charset="0"/>
+                <a:cs typeface="Baloo Bhai 2" panose="03080502040302020200" pitchFamily="66" charset="0"/>
+              </a:rPr>
+              <a:t>Question: When was the employer of </a:t>
+            </a:r>
+            <a:r>
+              <a:rPr lang="en-US" altLang="zh-CN" u="sng" dirty="0">
+                <a:solidFill>
+                  <a:srgbClr val="FF3B39"/>
+                </a:solidFill>
+                <a:latin typeface="Baloo Bhai 2" panose="03080502040302020200" pitchFamily="66" charset="0"/>
+                <a:cs typeface="Baloo Bhai 2" panose="03080502040302020200" pitchFamily="66" charset="0"/>
+              </a:rPr>
+              <a:t>John J. Collins </a:t>
+            </a:r>
+            <a:r>
+              <a:rPr lang="en-US" altLang="zh-CN" dirty="0">
+                <a:solidFill>
+                  <a:schemeClr val="tx1"/>
+                </a:solidFill>
+                <a:latin typeface="Baloo Bhai 2" panose="03080502040302020200" pitchFamily="66" charset="0"/>
+                <a:cs typeface="Baloo Bhai 2" panose="03080502040302020200" pitchFamily="66" charset="0"/>
+              </a:rPr>
+              <a:t>established?</a:t>
+            </a:r>
+            <a:endParaRPr kumimoji="1" lang="en-US" altLang="zh-CN" dirty="0">
+              <a:solidFill>
+                <a:schemeClr val="tx1"/>
+              </a:solidFill>
+              <a:latin typeface="Baloo Bhai 2" panose="03080502040302020200" pitchFamily="66" charset="0"/>
+              <a:cs typeface="Baloo Bhai 2" panose="03080502040302020200" pitchFamily="66" charset="0"/>
+            </a:endParaRPr>
+          </a:p>
+          <a:p>
+            <a:r>
+              <a:rPr kumimoji="1" lang="en-US" altLang="zh-CN" dirty="0">
+                <a:solidFill>
+                  <a:schemeClr val="tx1"/>
+                </a:solidFill>
+                <a:latin typeface="Baloo Bhai 2" panose="03080502040302020200" pitchFamily="66" charset="0"/>
+                <a:cs typeface="Baloo Bhai 2" panose="03080502040302020200" pitchFamily="66" charset="0"/>
+              </a:rPr>
+              <a:t>Sub-questions:</a:t>
+            </a:r>
+          </a:p>
+          <a:p>
+            <a:pPr marL="342900" indent="-342900">
+              <a:buAutoNum type="arabicPeriod"/>
+            </a:pPr>
+            <a:r>
+              <a:rPr lang="en-US" altLang="zh-CN" dirty="0">
+                <a:solidFill>
+                  <a:schemeClr val="tx1"/>
+                </a:solidFill>
+                <a:latin typeface="Baloo Bhai 2" panose="03080502040302020200" pitchFamily="66" charset="0"/>
+                <a:cs typeface="Baloo Bhai 2" panose="03080502040302020200" pitchFamily="66" charset="0"/>
+              </a:rPr>
+              <a:t>Who was the employer of John J. Collins?               ❌</a:t>
+            </a:r>
+          </a:p>
+          <a:p>
+            <a:pPr lvl="1"/>
+            <a:r>
+              <a:rPr lang="en-US" altLang="zh-CN" dirty="0">
+                <a:solidFill>
+                  <a:schemeClr val="tx1"/>
+                </a:solidFill>
+                <a:latin typeface="Baloo Bhai 2" panose="03080502040302020200" pitchFamily="66" charset="0"/>
+                <a:cs typeface="Baloo Bhai 2" panose="03080502040302020200" pitchFamily="66" charset="0"/>
+              </a:rPr>
+              <a:t>Fact [1] mentions Lucas Bradley employed </a:t>
+            </a:r>
+            <a:r>
+              <a:rPr lang="en-US" altLang="zh-CN" u="sng" dirty="0">
+                <a:solidFill>
+                  <a:srgbClr val="FF3B39"/>
+                </a:solidFill>
+                <a:latin typeface="Baloo Bhai 2" panose="03080502040302020200" pitchFamily="66" charset="0"/>
+                <a:cs typeface="Baloo Bhai 2" panose="03080502040302020200" pitchFamily="66" charset="0"/>
+              </a:rPr>
+              <a:t>John Collins </a:t>
+            </a:r>
+            <a:r>
+              <a:rPr lang="en-US" altLang="zh-CN" dirty="0">
+                <a:solidFill>
+                  <a:schemeClr val="tx1"/>
+                </a:solidFill>
+                <a:latin typeface="Baloo Bhai 2" panose="03080502040302020200" pitchFamily="66" charset="0"/>
+                <a:cs typeface="Baloo Bhai 2" panose="03080502040302020200" pitchFamily="66" charset="0"/>
+              </a:rPr>
+              <a:t>as an architect.</a:t>
+            </a:r>
+          </a:p>
+          <a:p>
+            <a:pPr marL="342900" indent="-342900">
+              <a:buFontTx/>
+              <a:buAutoNum type="arabicPeriod"/>
+            </a:pPr>
+            <a:r>
+              <a:rPr lang="en-US" altLang="zh-CN" dirty="0">
+                <a:solidFill>
+                  <a:schemeClr val="tx1"/>
+                </a:solidFill>
+                <a:latin typeface="Baloo Bhai 2" panose="03080502040302020200" pitchFamily="66" charset="0"/>
+                <a:cs typeface="Baloo Bhai 2" panose="03080502040302020200" pitchFamily="66" charset="0"/>
+              </a:rPr>
+              <a:t>When was </a:t>
+            </a:r>
+            <a:r>
+              <a:rPr lang="en-US" altLang="zh-CN" dirty="0">
+                <a:solidFill>
+                  <a:srgbClr val="FF3B39"/>
+                </a:solidFill>
+                <a:latin typeface="Baloo Bhai 2" panose="03080502040302020200" pitchFamily="66" charset="0"/>
+                <a:cs typeface="Baloo Bhai 2" panose="03080502040302020200" pitchFamily="66" charset="0"/>
+              </a:rPr>
+              <a:t>Lucas Bradley </a:t>
+            </a:r>
+            <a:r>
+              <a:rPr lang="en-US" altLang="zh-CN" dirty="0">
+                <a:solidFill>
+                  <a:schemeClr val="tx1"/>
+                </a:solidFill>
+                <a:latin typeface="Baloo Bhai 2" panose="03080502040302020200" pitchFamily="66" charset="0"/>
+                <a:cs typeface="Baloo Bhai 2" panose="03080502040302020200" pitchFamily="66" charset="0"/>
+              </a:rPr>
+              <a:t>established? </a:t>
+            </a:r>
+          </a:p>
+        </p:txBody>
+      </p:sp>
+      <p:cxnSp>
+        <p:nvCxnSpPr>
+          <p:cNvPr id="15" name="直线箭头连接符 14">
+            <a:extLst>
+              <a:ext uri="{FF2B5EF4-FFF2-40B4-BE49-F238E27FC236}">
+                <a16:creationId xmlns:a16="http://schemas.microsoft.com/office/drawing/2014/main" id="{B8F662CB-EF30-E2CB-1633-2CFF43032840}"/>
+              </a:ext>
+            </a:extLst>
+          </p:cNvPr>
+          <p:cNvCxnSpPr>
+            <a:cxnSpLocks/>
+          </p:cNvCxnSpPr>
+          <p:nvPr/>
+        </p:nvCxnSpPr>
+        <p:spPr>
+          <a:xfrm>
+            <a:off x="5301761" y="5292969"/>
+            <a:ext cx="0" cy="465992"/>
+          </a:xfrm>
+          <a:prstGeom prst="straightConnector1">
+            <a:avLst/>
+          </a:prstGeom>
+          <a:ln>
+            <a:solidFill>
+              <a:srgbClr val="FF3B39"/>
+            </a:solidFill>
+            <a:headEnd type="triangle"/>
+            <a:tailEnd type="triangle"/>
+          </a:ln>
+        </p:spPr>
+        <p:style>
+          <a:lnRef idx="2">
+            <a:schemeClr val="accent1"/>
+          </a:lnRef>
+          <a:fillRef idx="0">
+            <a:schemeClr val="accent1"/>
+          </a:fillRef>
+          <a:effectRef idx="1">
+            <a:schemeClr val="accent1"/>
+          </a:effectRef>
+          <a:fontRef idx="minor">
+            <a:schemeClr val="tx1"/>
+          </a:fontRef>
+        </p:style>
+      </p:cxnSp>
+      <p:sp>
+        <p:nvSpPr>
+          <p:cNvPr id="9" name="圆角矩形 8">
+            <a:extLst>
+              <a:ext uri="{FF2B5EF4-FFF2-40B4-BE49-F238E27FC236}">
+                <a16:creationId xmlns:a16="http://schemas.microsoft.com/office/drawing/2014/main" id="{26BC86E5-A103-7221-A730-E72F922FD56C}"/>
+              </a:ext>
+            </a:extLst>
+          </p:cNvPr>
+          <p:cNvSpPr/>
+          <p:nvPr/>
+        </p:nvSpPr>
+        <p:spPr>
+          <a:xfrm>
+            <a:off x="201475" y="2535123"/>
+            <a:ext cx="6885125" cy="2028086"/>
+          </a:xfrm>
+          <a:prstGeom prst="roundRect">
+            <a:avLst/>
+          </a:prstGeom>
+          <a:solidFill>
+            <a:schemeClr val="accent2">
+              <a:lumMod val="40000"/>
+              <a:lumOff val="60000"/>
+            </a:schemeClr>
+          </a:solidFill>
+          <a:ln w="38100" cap="rnd">
+            <a:noFill/>
+            <a:miter lim="800000"/>
+          </a:ln>
+          <a:effectLst>
+            <a:outerShdw blurRad="63500" sx="101000" sy="101000" algn="ctr" rotWithShape="0">
+              <a:prstClr val="black">
+                <a:alpha val="40000"/>
+              </a:prstClr>
+            </a:outerShdw>
+            <a:softEdge rad="0"/>
+          </a:effectLst>
+        </p:spPr>
+        <p:style>
+          <a:lnRef idx="2">
+            <a:schemeClr val="accent1">
+              <a:shade val="15000"/>
+            </a:schemeClr>
+          </a:lnRef>
+          <a:fillRef idx="1">
+            <a:schemeClr val="accent1"/>
+          </a:fillRef>
+          <a:effectRef idx="0">
+            <a:schemeClr val="accent1"/>
+          </a:effectRef>
+          <a:fontRef idx="minor">
+            <a:schemeClr val="lt1"/>
+          </a:fontRef>
+        </p:style>
+        <p:txBody>
+          <a:bodyPr rtlCol="0" anchor="ctr"/>
+          <a:lstStyle/>
+          <a:p>
+            <a:r>
+              <a:rPr kumimoji="1" lang="en-US" altLang="zh-CN" b="1" dirty="0">
+                <a:solidFill>
+                  <a:schemeClr val="tx1"/>
+                </a:solidFill>
+                <a:latin typeface="Baloo Bhai 2" panose="03080502040302020200" pitchFamily="66" charset="0"/>
+                <a:cs typeface="Baloo Bhai 2" panose="03080502040302020200" pitchFamily="66" charset="0"/>
+              </a:rPr>
+              <a:t>Frame Shift</a:t>
+            </a:r>
+          </a:p>
+          <a:p>
+            <a:r>
+              <a:rPr kumimoji="1" lang="en-US" altLang="zh-CN" dirty="0">
+                <a:solidFill>
+                  <a:schemeClr val="tx1"/>
+                </a:solidFill>
+                <a:latin typeface="Baloo Bhai 2" panose="03080502040302020200" pitchFamily="66" charset="0"/>
+                <a:cs typeface="Baloo Bhai 2" panose="03080502040302020200" pitchFamily="66" charset="0"/>
+              </a:rPr>
+              <a:t>Question: “George Lucas created what character to raise Boba Fett?”</a:t>
+            </a:r>
+          </a:p>
+          <a:p>
+            <a:r>
+              <a:rPr kumimoji="1" lang="en-US" altLang="zh-CN" dirty="0">
+                <a:solidFill>
+                  <a:schemeClr val="tx1"/>
+                </a:solidFill>
+                <a:latin typeface="Baloo Bhai 2" panose="03080502040302020200" pitchFamily="66" charset="0"/>
+                <a:cs typeface="Baloo Bhai 2" panose="03080502040302020200" pitchFamily="66" charset="0"/>
+              </a:rPr>
+              <a:t>Sub-questions:</a:t>
+            </a:r>
+          </a:p>
+          <a:p>
+            <a:pPr marL="342900" indent="-342900">
+              <a:buAutoNum type="arabicPeriod"/>
+            </a:pPr>
+            <a:r>
+              <a:rPr kumimoji="1" lang="en-US" altLang="zh-CN" dirty="0">
+                <a:solidFill>
+                  <a:schemeClr val="tx1"/>
+                </a:solidFill>
+                <a:latin typeface="Baloo Bhai 2" panose="03080502040302020200" pitchFamily="66" charset="0"/>
+                <a:cs typeface="Baloo Bhai 2" panose="03080502040302020200" pitchFamily="66" charset="0"/>
+              </a:rPr>
+              <a:t>What is the name of the character that George Lucas created?</a:t>
+            </a:r>
+          </a:p>
+          <a:p>
+            <a:pPr marL="342900" indent="-342900">
+              <a:buAutoNum type="arabicPeriod"/>
+            </a:pPr>
+            <a:r>
+              <a:rPr kumimoji="1" lang="en-US" altLang="zh-CN" dirty="0">
+                <a:solidFill>
+                  <a:schemeClr val="tx1"/>
+                </a:solidFill>
+                <a:latin typeface="Baloo Bhai 2" panose="03080502040302020200" pitchFamily="66" charset="0"/>
+                <a:cs typeface="Baloo Bhai 2" panose="03080502040302020200" pitchFamily="66" charset="0"/>
+              </a:rPr>
+              <a:t>Which character is associated with raising Boba Fett?</a:t>
+            </a:r>
+          </a:p>
+          <a:p>
+            <a:pPr marL="342900" indent="-342900">
+              <a:buAutoNum type="arabicPeriod"/>
+            </a:pPr>
+            <a:r>
+              <a:rPr kumimoji="1" lang="en-US" altLang="zh-CN" dirty="0">
+                <a:solidFill>
+                  <a:srgbClr val="FF3B39"/>
+                </a:solidFill>
+                <a:latin typeface="Baloo Bhai 2" panose="03080502040302020200" pitchFamily="66" charset="0"/>
+                <a:cs typeface="Baloo Bhai 2" panose="03080502040302020200" pitchFamily="66" charset="0"/>
+              </a:rPr>
+              <a:t>Where was George Lucas born? </a:t>
+            </a:r>
+            <a:r>
+              <a:rPr lang="en-US" altLang="zh-CN" dirty="0">
+                <a:solidFill>
+                  <a:srgbClr val="FF3B39"/>
+                </a:solidFill>
+                <a:latin typeface="Baloo Bhai 2" panose="03080502040302020200" pitchFamily="66" charset="0"/>
+                <a:cs typeface="Baloo Bhai 2" panose="03080502040302020200" pitchFamily="66" charset="0"/>
+              </a:rPr>
+              <a:t>❌</a:t>
+            </a:r>
+            <a:endParaRPr kumimoji="1" lang="en-US" altLang="zh-CN" dirty="0">
+              <a:solidFill>
+                <a:srgbClr val="FF3B39"/>
+              </a:solidFill>
+              <a:latin typeface="Baloo Bhai 2" panose="03080502040302020200" pitchFamily="66" charset="0"/>
+              <a:cs typeface="Baloo Bhai 2" panose="03080502040302020200" pitchFamily="66" charset="0"/>
+            </a:endParaRPr>
+          </a:p>
+        </p:txBody>
+      </p:sp>
+    </p:spTree>
+    <p:extLst>
+      <p:ext uri="{BB962C8B-B14F-4D97-AF65-F5344CB8AC3E}">
+        <p14:creationId xmlns:p14="http://schemas.microsoft.com/office/powerpoint/2010/main" val="3733331345"/>
+      </p:ext>
+    </p:extLst>
+  </p:cSld>
+  <p:clrMapOvr>
+    <a:masterClrMapping/>
+  </p:clrMapOvr>
+</p:sld>
+</file>
+
+<file path=ppt/slides/slide3.xml><?xml version="1.0" encoding="utf-8"?>
+<p:sld xmlns:a="http://schemas.openxmlformats.org/drawingml/2006/main" xmlns:r="http://schemas.openxmlformats.org/officeDocument/2006/relationships" xmlns:p="http://schemas.openxmlformats.org/presentationml/2006/main">
+  <p:cSld>
+    <p:spTree>
+      <p:nvGrpSpPr>
+        <p:cNvPr id="1" name="">
+          <a:extLst>
+            <a:ext uri="{FF2B5EF4-FFF2-40B4-BE49-F238E27FC236}">
+              <a16:creationId xmlns:a16="http://schemas.microsoft.com/office/drawing/2014/main" id="{BC1D8CFF-E11F-ADC0-61C1-8DDE994EA19C}"/>
+            </a:ext>
+          </a:extLst>
+        </p:cNvPr>
+        <p:cNvGrpSpPr/>
+        <p:nvPr/>
+      </p:nvGrpSpPr>
+      <p:grpSpPr>
+        <a:xfrm>
+          <a:off x="0" y="0"/>
+          <a:ext cx="0" cy="0"/>
+          <a:chOff x="0" y="0"/>
+          <a:chExt cx="0" cy="0"/>
+        </a:xfrm>
+      </p:grpSpPr>
+      <p:sp>
+        <p:nvSpPr>
+          <p:cNvPr id="2" name="标题 1">
+            <a:extLst>
+              <a:ext uri="{FF2B5EF4-FFF2-40B4-BE49-F238E27FC236}">
+                <a16:creationId xmlns:a16="http://schemas.microsoft.com/office/drawing/2014/main" id="{AF802D02-F117-FE8D-227C-C01B88B46664}"/>
+              </a:ext>
+            </a:extLst>
+          </p:cNvPr>
+          <p:cNvSpPr>
+            <a:spLocks noGrp="1"/>
+          </p:cNvSpPr>
+          <p:nvPr>
+            <p:ph type="title"/>
+          </p:nvPr>
+        </p:nvSpPr>
+        <p:spPr>
+          <a:xfrm>
+            <a:off x="0" y="0"/>
+            <a:ext cx="10204729" cy="759309"/>
+          </a:xfrm>
+        </p:spPr>
+        <p:txBody>
+          <a:bodyPr/>
+          <a:lstStyle/>
+          <a:p>
+            <a:r>
+              <a:rPr kumimoji="1" lang="en-US" altLang="zh-CN" b="1" dirty="0"/>
+              <a:t>Problem</a:t>
+            </a:r>
+            <a:r>
+              <a:rPr kumimoji="1" lang="zh-CN" altLang="en-US" b="1" dirty="0"/>
+              <a:t> </a:t>
+            </a:r>
+            <a:r>
+              <a:rPr kumimoji="1" lang="en-US" altLang="zh-CN" b="1" dirty="0"/>
+              <a:t>&amp;</a:t>
+            </a:r>
+            <a:r>
+              <a:rPr kumimoji="1" lang="zh-CN" altLang="en-US" b="1" dirty="0"/>
+              <a:t> </a:t>
+            </a:r>
+            <a:r>
+              <a:rPr kumimoji="1" lang="en-US" altLang="zh-CN" b="1" dirty="0"/>
+              <a:t>Core</a:t>
+            </a:r>
+            <a:r>
+              <a:rPr kumimoji="1" lang="zh-CN" altLang="en-US" b="1" dirty="0"/>
+              <a:t> </a:t>
+            </a:r>
+            <a:r>
+              <a:rPr kumimoji="1" lang="en-US" altLang="zh-CN" b="1" dirty="0"/>
+              <a:t>Bottleneck</a:t>
+            </a:r>
+            <a:r>
+              <a:rPr kumimoji="1" lang="zh-CN" altLang="en-US" b="1" dirty="0"/>
+              <a:t> </a:t>
+            </a:r>
+            <a:r>
+              <a:rPr kumimoji="1" lang="en-US" altLang="zh-CN" b="1" dirty="0"/>
+              <a:t>Examples</a:t>
+            </a:r>
+            <a:endParaRPr kumimoji="1" lang="zh-CN" altLang="en-US" b="1" dirty="0"/>
+          </a:p>
+        </p:txBody>
+      </p:sp>
+      <p:sp>
+        <p:nvSpPr>
+          <p:cNvPr id="11" name="圆角矩形 10">
+            <a:extLst>
+              <a:ext uri="{FF2B5EF4-FFF2-40B4-BE49-F238E27FC236}">
+                <a16:creationId xmlns:a16="http://schemas.microsoft.com/office/drawing/2014/main" id="{329BA2B2-2AA8-0F9D-CFBF-29EC8240053F}"/>
+              </a:ext>
+            </a:extLst>
+          </p:cNvPr>
+          <p:cNvSpPr/>
+          <p:nvPr/>
+        </p:nvSpPr>
+        <p:spPr>
+          <a:xfrm>
+            <a:off x="4913363" y="1514387"/>
+            <a:ext cx="5995429" cy="1411693"/>
+          </a:xfrm>
+          <a:prstGeom prst="roundRect">
+            <a:avLst/>
+          </a:prstGeom>
+          <a:solidFill>
+            <a:srgbClr val="BACCD9"/>
+          </a:solidFill>
+          <a:ln w="38100" cap="rnd">
+            <a:noFill/>
+            <a:miter lim="800000"/>
+          </a:ln>
+          <a:effectLst>
+            <a:outerShdw blurRad="63500" sx="101000" sy="101000" algn="ctr" rotWithShape="0">
+              <a:prstClr val="black">
+                <a:alpha val="40000"/>
+              </a:prstClr>
+            </a:outerShdw>
+            <a:softEdge rad="0"/>
+          </a:effectLst>
+        </p:spPr>
+        <p:style>
+          <a:lnRef idx="2">
+            <a:schemeClr val="accent1">
+              <a:shade val="15000"/>
+            </a:schemeClr>
+          </a:lnRef>
+          <a:fillRef idx="1">
+            <a:schemeClr val="accent1"/>
+          </a:fillRef>
+          <a:effectRef idx="0">
+            <a:schemeClr val="accent1"/>
+          </a:effectRef>
+          <a:fontRef idx="minor">
+            <a:schemeClr val="lt1"/>
+          </a:fontRef>
+        </p:style>
+        <p:txBody>
+          <a:bodyPr rtlCol="0" anchor="ctr"/>
+          <a:lstStyle/>
+          <a:p>
+            <a:r>
+              <a:rPr lang="en-US" altLang="zh-CN" b="1" dirty="0">
+                <a:solidFill>
+                  <a:schemeClr val="tx1"/>
+                </a:solidFill>
+                <a:latin typeface="Baloo Bhai 2" panose="03080502040302020200" pitchFamily="66" charset="0"/>
+                <a:cs typeface="Baloo Bhai 2" panose="03080502040302020200" pitchFamily="66" charset="0"/>
+              </a:rPr>
+              <a:t>Decomposition Error</a:t>
+            </a:r>
+          </a:p>
+          <a:p>
+            <a:r>
+              <a:rPr lang="en-US" altLang="zh-CN" dirty="0">
+                <a:latin typeface="Baloo Bhai 2" panose="03080502040302020200" pitchFamily="66" charset="0"/>
+                <a:cs typeface="Baloo Bhai 2" panose="03080502040302020200" pitchFamily="66" charset="0"/>
+              </a:rPr>
+              <a:t>Model fails at breaking the question into the right sub-questions</a:t>
+            </a:r>
+            <a:r>
+              <a:rPr lang="zh-CN" altLang="en-US" dirty="0">
+                <a:latin typeface="Baloo Bhai 2" panose="03080502040302020200" pitchFamily="66" charset="0"/>
+                <a:cs typeface="Baloo Bhai 2" panose="03080502040302020200" pitchFamily="66" charset="0"/>
+              </a:rPr>
+              <a:t> </a:t>
+            </a:r>
+            <a:r>
+              <a:rPr lang="en-US" altLang="zh-CN" dirty="0">
+                <a:latin typeface="Baloo Bhai 2" panose="03080502040302020200" pitchFamily="66" charset="0"/>
+                <a:cs typeface="Baloo Bhai 2" panose="03080502040302020200" pitchFamily="66" charset="0"/>
+              </a:rPr>
+              <a:t>and the subsequent reasoning is built on an incorrect path.</a:t>
+            </a:r>
+            <a:endParaRPr lang="en-US" altLang="zh-CN" b="1" dirty="0">
+              <a:solidFill>
+                <a:schemeClr val="tx1"/>
+              </a:solidFill>
+              <a:latin typeface="Baloo Bhai 2" panose="03080502040302020200" pitchFamily="66" charset="0"/>
+              <a:cs typeface="Baloo Bhai 2" panose="03080502040302020200" pitchFamily="66" charset="0"/>
+            </a:endParaRPr>
+          </a:p>
+        </p:txBody>
+      </p:sp>
+      <p:cxnSp>
+        <p:nvCxnSpPr>
+          <p:cNvPr id="15" name="直线箭头连接符 14">
+            <a:extLst>
+              <a:ext uri="{FF2B5EF4-FFF2-40B4-BE49-F238E27FC236}">
+                <a16:creationId xmlns:a16="http://schemas.microsoft.com/office/drawing/2014/main" id="{68DCA421-0A3C-B03B-5ADA-838237692AD8}"/>
+              </a:ext>
+            </a:extLst>
+          </p:cNvPr>
+          <p:cNvCxnSpPr>
+            <a:cxnSpLocks/>
+          </p:cNvCxnSpPr>
+          <p:nvPr/>
+        </p:nvCxnSpPr>
+        <p:spPr>
+          <a:xfrm>
+            <a:off x="5301761" y="5292969"/>
+            <a:ext cx="0" cy="465992"/>
+          </a:xfrm>
+          <a:prstGeom prst="straightConnector1">
+            <a:avLst/>
+          </a:prstGeom>
+          <a:ln>
+            <a:solidFill>
+              <a:srgbClr val="FF0000"/>
+            </a:solidFill>
+            <a:headEnd type="triangle"/>
+            <a:tailEnd type="triangle"/>
+          </a:ln>
+        </p:spPr>
+        <p:style>
+          <a:lnRef idx="2">
+            <a:schemeClr val="accent1"/>
+          </a:lnRef>
+          <a:fillRef idx="0">
+            <a:schemeClr val="accent1"/>
+          </a:fillRef>
+          <a:effectRef idx="1">
+            <a:schemeClr val="accent1"/>
+          </a:effectRef>
+          <a:fontRef idx="minor">
+            <a:schemeClr val="tx1"/>
+          </a:fontRef>
+        </p:style>
+      </p:cxnSp>
+      <p:pic>
+        <p:nvPicPr>
+          <p:cNvPr id="10" name="图片 9" descr="图表, 条形图&#10;&#10;AI 生成的内容可能不正确。">
+            <a:extLst>
+              <a:ext uri="{FF2B5EF4-FFF2-40B4-BE49-F238E27FC236}">
+                <a16:creationId xmlns:a16="http://schemas.microsoft.com/office/drawing/2014/main" id="{EF03C6DC-02BE-303A-1ACC-75E0059C90CF}"/>
+              </a:ext>
+            </a:extLst>
+          </p:cNvPr>
+          <p:cNvPicPr>
+            <a:picLocks noChangeAspect="1"/>
+          </p:cNvPicPr>
+          <p:nvPr/>
+        </p:nvPicPr>
+        <p:blipFill>
+          <a:blip r:embed="rId2"/>
+          <a:stretch>
+            <a:fillRect/>
+          </a:stretch>
+        </p:blipFill>
+        <p:spPr>
+          <a:xfrm>
+            <a:off x="225552" y="1514387"/>
+            <a:ext cx="4572000" cy="4572000"/>
+          </a:xfrm>
+          <a:prstGeom prst="rect">
+            <a:avLst/>
+          </a:prstGeom>
+          <a:effectLst/>
+        </p:spPr>
+      </p:pic>
+      <p:sp>
+        <p:nvSpPr>
+          <p:cNvPr id="12" name="圆角矩形 11">
+            <a:extLst>
+              <a:ext uri="{FF2B5EF4-FFF2-40B4-BE49-F238E27FC236}">
+                <a16:creationId xmlns:a16="http://schemas.microsoft.com/office/drawing/2014/main" id="{3B3CBB49-0AE4-E822-1FCC-F246D1D845D1}"/>
+              </a:ext>
+            </a:extLst>
+          </p:cNvPr>
+          <p:cNvSpPr/>
+          <p:nvPr/>
+        </p:nvSpPr>
+        <p:spPr>
+          <a:xfrm>
+            <a:off x="4913363" y="3094540"/>
+            <a:ext cx="5995429" cy="1411693"/>
+          </a:xfrm>
+          <a:prstGeom prst="roundRect">
+            <a:avLst/>
+          </a:prstGeom>
+          <a:solidFill>
+            <a:srgbClr val="5598C4"/>
+          </a:solidFill>
+          <a:ln w="38100" cap="rnd">
+            <a:noFill/>
+            <a:miter lim="800000"/>
+          </a:ln>
+          <a:effectLst>
+            <a:outerShdw blurRad="63500" sx="101000" sy="101000" algn="ctr" rotWithShape="0">
+              <a:prstClr val="black">
+                <a:alpha val="40000"/>
+              </a:prstClr>
+            </a:outerShdw>
+            <a:softEdge rad="0"/>
+          </a:effectLst>
+        </p:spPr>
+        <p:style>
+          <a:lnRef idx="2">
+            <a:schemeClr val="accent1">
+              <a:shade val="15000"/>
+            </a:schemeClr>
+          </a:lnRef>
+          <a:fillRef idx="1">
+            <a:schemeClr val="accent1"/>
+          </a:fillRef>
+          <a:effectRef idx="0">
+            <a:schemeClr val="accent1"/>
+          </a:effectRef>
+          <a:fontRef idx="minor">
+            <a:schemeClr val="lt1"/>
+          </a:fontRef>
+        </p:style>
+        <p:txBody>
+          <a:bodyPr rtlCol="0" anchor="ctr"/>
+          <a:lstStyle/>
+          <a:p>
+            <a:r>
+              <a:rPr lang="en-US" altLang="zh-CN" b="1" dirty="0">
+                <a:solidFill>
+                  <a:schemeClr val="tx1"/>
+                </a:solidFill>
+                <a:latin typeface="Baloo Bhai 2" panose="03080502040302020200" pitchFamily="66" charset="0"/>
+                <a:cs typeface="Baloo Bhai 2" panose="03080502040302020200" pitchFamily="66" charset="0"/>
+              </a:rPr>
+              <a:t>Integration Error</a:t>
+            </a:r>
+          </a:p>
+          <a:p>
+            <a:r>
+              <a:rPr lang="en-US" altLang="zh-CN" dirty="0">
+                <a:latin typeface="Baloo Bhai 2" panose="03080502040302020200" pitchFamily="66" charset="0"/>
+                <a:cs typeface="Baloo Bhai 2" panose="03080502040302020200" pitchFamily="66" charset="0"/>
+              </a:rPr>
+              <a:t>Model failures in the final answer integration or logical aggregation step, given that the model has already retrieved all the necessary evidence.</a:t>
+            </a:r>
+            <a:endParaRPr lang="en-US" altLang="zh-CN" b="1" dirty="0">
+              <a:solidFill>
+                <a:schemeClr val="tx1"/>
+              </a:solidFill>
+              <a:latin typeface="Baloo Bhai 2" panose="03080502040302020200" pitchFamily="66" charset="0"/>
+              <a:cs typeface="Baloo Bhai 2" panose="03080502040302020200" pitchFamily="66" charset="0"/>
+            </a:endParaRPr>
+          </a:p>
+        </p:txBody>
+      </p:sp>
+      <p:sp>
+        <p:nvSpPr>
+          <p:cNvPr id="13" name="圆角矩形 12">
+            <a:extLst>
+              <a:ext uri="{FF2B5EF4-FFF2-40B4-BE49-F238E27FC236}">
+                <a16:creationId xmlns:a16="http://schemas.microsoft.com/office/drawing/2014/main" id="{45BFF761-BC6A-DAFE-406F-DE46A07CABEF}"/>
+              </a:ext>
+            </a:extLst>
+          </p:cNvPr>
+          <p:cNvSpPr/>
+          <p:nvPr/>
+        </p:nvSpPr>
+        <p:spPr>
+          <a:xfrm>
+            <a:off x="4913363" y="4674694"/>
+            <a:ext cx="5995429" cy="1411693"/>
+          </a:xfrm>
+          <a:prstGeom prst="roundRect">
+            <a:avLst/>
+          </a:prstGeom>
+          <a:solidFill>
+            <a:srgbClr val="10659B"/>
+          </a:solidFill>
+          <a:ln w="38100" cap="rnd">
+            <a:noFill/>
+            <a:miter lim="800000"/>
+          </a:ln>
+          <a:effectLst>
+            <a:outerShdw blurRad="63500" sx="101000" sy="101000" algn="ctr" rotWithShape="0">
+              <a:prstClr val="black">
+                <a:alpha val="40000"/>
+              </a:prstClr>
+            </a:outerShdw>
+            <a:softEdge rad="0"/>
+          </a:effectLst>
+        </p:spPr>
+        <p:style>
+          <a:lnRef idx="2">
+            <a:schemeClr val="accent1">
+              <a:shade val="15000"/>
+            </a:schemeClr>
+          </a:lnRef>
+          <a:fillRef idx="1">
+            <a:schemeClr val="accent1"/>
+          </a:fillRef>
+          <a:effectRef idx="0">
+            <a:schemeClr val="accent1"/>
+          </a:effectRef>
+          <a:fontRef idx="minor">
+            <a:schemeClr val="lt1"/>
+          </a:fontRef>
+        </p:style>
+        <p:txBody>
+          <a:bodyPr rtlCol="0" anchor="ctr"/>
+          <a:lstStyle/>
+          <a:p>
+            <a:r>
+              <a:rPr lang="en-US" altLang="zh-CN" b="1" dirty="0">
+                <a:solidFill>
+                  <a:schemeClr val="tx1"/>
+                </a:solidFill>
+                <a:latin typeface="Baloo Bhai 2" panose="03080502040302020200" pitchFamily="66" charset="0"/>
+                <a:cs typeface="Baloo Bhai 2" panose="03080502040302020200" pitchFamily="66" charset="0"/>
+              </a:rPr>
+              <a:t>Evidence Error</a:t>
+            </a:r>
+          </a:p>
+          <a:p>
+            <a:r>
+              <a:rPr lang="en-US" altLang="zh-CN" dirty="0">
+                <a:latin typeface="Baloo Bhai 2" panose="03080502040302020200" pitchFamily="66" charset="0"/>
+                <a:cs typeface="Baloo Bhai 2" panose="03080502040302020200" pitchFamily="66" charset="0"/>
+              </a:rPr>
+              <a:t>Model retrieval</a:t>
+            </a:r>
+            <a:r>
+              <a:rPr lang="zh-CN" altLang="en-US" dirty="0">
+                <a:latin typeface="Baloo Bhai 2" panose="03080502040302020200" pitchFamily="66" charset="0"/>
+                <a:cs typeface="Baloo Bhai 2" panose="03080502040302020200" pitchFamily="66" charset="0"/>
+              </a:rPr>
+              <a:t> </a:t>
+            </a:r>
+            <a:r>
+              <a:rPr lang="en-US" altLang="zh-CN" dirty="0">
+                <a:latin typeface="Baloo Bhai 2" panose="03080502040302020200" pitchFamily="66" charset="0"/>
+                <a:cs typeface="Baloo Bhai 2" panose="03080502040302020200" pitchFamily="66" charset="0"/>
+              </a:rPr>
+              <a:t>insufficient facts or cite the wrong supporting fact even if the surface structure of the question decomposition is correct.</a:t>
+            </a:r>
+            <a:endParaRPr lang="en-US" altLang="zh-CN" b="1" dirty="0">
+              <a:solidFill>
+                <a:schemeClr val="tx1"/>
+              </a:solidFill>
+              <a:latin typeface="Baloo Bhai 2" panose="03080502040302020200" pitchFamily="66" charset="0"/>
+              <a:cs typeface="Baloo Bhai 2" panose="03080502040302020200" pitchFamily="66" charset="0"/>
+            </a:endParaRPr>
+          </a:p>
+        </p:txBody>
+      </p:sp>
+    </p:spTree>
+    <p:extLst>
+      <p:ext uri="{BB962C8B-B14F-4D97-AF65-F5344CB8AC3E}">
+        <p14:creationId xmlns:p14="http://schemas.microsoft.com/office/powerpoint/2010/main" val="568465903"/>
+      </p:ext>
+    </p:extLst>
+  </p:cSld>
+  <p:clrMapOvr>
+    <a:masterClrMapping/>
+  </p:clrMapOvr>
+</p:sld>
+</file>
+
+<file path=ppt/slides/slide4.xml><?xml version="1.0" encoding="utf-8"?>
 <p:sld xmlns:a="http://schemas.openxmlformats.org/drawingml/2006/main" xmlns:r="http://schemas.openxmlformats.org/officeDocument/2006/relationships" xmlns:p="http://schemas.openxmlformats.org/presentationml/2006/main">
   <p:cSld>
     <p:spTree>
